--- a/presentations/Hanui-Relay-4min.pptx
+++ b/presentations/Hanui-Relay-4min.pptx
@@ -515,7 +515,7 @@
           <a:p/>
           <a:p>
             <a:r>
-              <a:t>“안녕하세요. Hanui Relay는 한의사의 진단·평가와 생활 지침을 받아 AI가 먼저 환자에게 말을 걸고, 답변을 다음 내원의 근거 자료로 연결하는 로컬 프로토타입입니다. 환자와 한의사가 주 사용자입니다.”</a:t>
+              <a:t>“Hanui Relay는 한의사의 진단·생활 지침을 바탕으로 에이전트가 앱 안에서 먼저 말을 걸고, 환자 답변을 다음 방문까지 이어 관리하는 프로토타입입니다. 환자와 한의사가 주 사용자입니다.”</a:t>
             </a:r>
           </a:p>
         </p:txBody>
@@ -667,7 +667,7 @@
           <a:p/>
           <a:p>
             <a:r>
-              <a:t>“한의학을 택한 이유는 생활 지침, 한자 원전의 해석 장벽, 환자와 한의사의 반복 접점이 함께 있기 때문입니다. DB에는 현대 요약 42건과 고문헌 원문 57건이 있습니다. 한의사가 진단·지침을 넣으면 Hanui가 먼저 확인 질문을 하고, 환자 답변의 원문·날짜·수치를 서버가 대조합니다. AI가 새 진단을 내리지 않습니다.”</a:t>
+              <a:t>“한의학에서 시작한 중심 이유는 저작권이 만료된 고문헌 원전을 출처와 함께 활용할 수 있기 때문입니다. 한자 원문의 해석 장벽과 생활 지침을 이어 관리할 필요도 있습니다. 현대 번역·편집본은 별도 권리로 구분합니다. 현재 DB는 현대 요약 42건과 고문헌 원문 57건입니다. 원문 인용이 없으면 답변을 보류합니다.”</a:t>
             </a:r>
           </a:p>
         </p:txBody>
@@ -743,7 +743,7 @@
           <a:p/>
           <a:p>
             <a:r>
-              <a:t>“먼저 실제 Luna 대화 C입니다. 한의사가 입력한 취침 지침을 바탕으로 Hanui가 이미 먼저 질문했습니다. 제가 ‘어제 새벽 1시에 잤어. 어제 5시간 잤어’라고 답해 보겠습니다.” **C 화면에서 전송하고 약 20초 기다린다.** “서버가 제 발언의 날짜·시간을 확인해 지침과의 차이를 기록하고 다음 상태를 묻습니다. 오른쪽 PDF 화면은 별도 합성 데모 A의 같은 흐름입니다.”</a:t>
+              <a:t>“앱 안의 실제 Luna 대화 C입니다. 한의사가 입력한 취침 지침을 바탕으로 Hanui가 먼저 말을 걸었습니다. 제가 ‘어제 새벽 1시에 잤어. 어제 5시간 잤어’라고 답하겠습니다.” **C 화면에서 전송하고 약 20초 기다린다.** “발언의 날짜·시간을 확인해 기록하고 다음 상태를 묻습니다. 이는 앱 내 선제 대화이며 푸시나 문자를 보낸 것은 아닙니다. PDF 캡처는 별도 합성 데모 A입니다.” 시연 C: `http://127.0.0.1:8765/?session=a63cdbff74c6445a91a348fb03da48ed`</a:t>
             </a:r>
           </a:p>
         </p:txBody>
@@ -971,7 +971,7 @@
           <a:p/>
           <a:p>
             <a:r>
-              <a:t>“76개 단위 테스트와 실제 Luna 선행 질문·환자 답변·코칭 1회, 지침 4턴, 달력 8턴, 고문헌 번역 1턴을 확인했습니다. Codex가 원문과 실행 결과를 대조했고 사용자 피드백으로 대화창을 키웠습니다. 상충 발언은 잘못 판정하지 않고 보류합니다.”</a:t>
+              <a:t>“서브 에이전트로 고전 문헌탐색, 메인: UI·백엔드 구현을 진행했습니다. 메인 Codex가 원전 판본과 실제 인용 위치, 환자 원문·날짜·수치를 재검증하고 단위·UI·실제 Luna 연동을 확인했습니다. 80개 테스트가 통과했습니다. 가독성 피드백으로 대화창을 키우고 보조정보를 접었습니다.”</a:t>
             </a:r>
           </a:p>
         </p:txBody>
@@ -1047,7 +1047,7 @@
           <a:p/>
           <a:p>
             <a:r>
-              <a:t>“잠재 도입 주체는 한의원, 사용자는 환자입니다. 방문 전 확인 시간과 반복 질문 부담 감소는 가설입니다. 작은 파일럿에서 확인 시간·재사용률·모델 비용을 측정하겠습니다. 감사합니다.”</a:t>
+              <a:t>“한의학에서 시작해 이 구조를 현대의학 전반의 방문 관리로 확장할 계획입니다. 다른 분야에서는 검증된 해당 자료와 전문가 지침으로 교체하겠습니다. 지금은 한의학 프로토타입입니다. 감사합니다.”</a:t>
             </a:r>
           </a:p>
         </p:txBody>
@@ -4376,7 +4376,7 @@
               </a:defRPr>
             </a:pPr>
             <a:r>
-              <a:t>한의사 진단·지침 → AI 확인 질문 → 환자 답변 → 내원 리포트</a:t>
+              <a:t>한의사 진단·지침 → 앱 안에서 먼저 대화 → 다음 방문까지 관리</a:t>
             </a:r>
           </a:p>
         </p:txBody>
@@ -4827,8 +4827,8 @@
         </p:nvSpPr>
         <p:spPr>
           <a:xfrm>
-            <a:off x="594360" y="2011680"/>
-            <a:ext cx="64008" cy="2377440"/>
+            <a:off x="594360" y="2487168"/>
+            <a:ext cx="64008" cy="1426464"/>
           </a:xfrm>
           <a:prstGeom prst="rect">
             <a:avLst/>
@@ -4995,8 +4995,8 @@
         </p:nvSpPr>
         <p:spPr>
           <a:xfrm>
-            <a:off x="6263640" y="2011680"/>
-            <a:ext cx="64008" cy="2377440"/>
+            <a:off x="6263640" y="2487168"/>
+            <a:ext cx="64008" cy="1426464"/>
           </a:xfrm>
           <a:prstGeom prst="rect">
             <a:avLst/>
@@ -5250,7 +5250,7 @@
               </a:defRPr>
             </a:pPr>
             <a:r>
-              <a:t>HANUI RELAY  /  해결 방식</a:t>
+              <a:t>HANUI RELAY  /  왜 한의학인가</a:t>
             </a:r>
           </a:p>
         </p:txBody>
@@ -5289,7 +5289,7 @@
               </a:defRPr>
             </a:pPr>
             <a:r>
-              <a:t>한의학의 생활 지침을 대화와 근거에 연결한다</a:t>
+              <a:t>저작권이 만료된 고문헌 원전을 활용할 수 있다</a:t>
             </a:r>
           </a:p>
         </p:txBody>
@@ -5662,7 +5662,7 @@
               </a:defRPr>
             </a:pPr>
             <a:r>
-              <a:t>환자 답변 → 기록·짧은 코칭·고문헌 탐색</a:t>
+              <a:t>환자 답변 → 기록·코칭·고문헌 원문 탐색</a:t>
             </a:r>
           </a:p>
         </p:txBody>
@@ -5746,7 +5746,7 @@
               </a:defRPr>
             </a:pPr>
             <a:r>
-              <a:t>서버가 답변 원문·날짜·수치·인용 위치 검증</a:t>
+              <a:t>서버가 환자·고문헌 원문 검증, 인용 없으면 보류</a:t>
             </a:r>
           </a:p>
         </p:txBody>
@@ -5830,7 +5830,7 @@
               </a:defRPr>
             </a:pPr>
             <a:r>
-              <a:t>선택 이유: 생활 지침 + 한자 원전 장벽 + 환자·한의사 접점</a:t>
+              <a:t>고문헌 원전의 저작권 만료 / 현대 번역·편집본은 별도 권리</a:t>
             </a:r>
           </a:p>
         </p:txBody>
@@ -6061,7 +6061,7 @@
               </a:defRPr>
             </a:pPr>
             <a:r>
-              <a:t>한의사 지침을 받은 Hanui가 먼저 묻는다</a:t>
+              <a:t>앱 안에서 Hanui가 먼저 말을 건다</a:t>
             </a:r>
           </a:p>
         </p:txBody>
@@ -6250,8 +6250,8 @@
         </p:blipFill>
         <p:spPr>
           <a:xfrm>
-            <a:off x="5760720" y="1975104"/>
-            <a:ext cx="5714999" cy="3112128"/>
+            <a:off x="5989320" y="2303744"/>
+            <a:ext cx="5257800" cy="2863158"/>
           </a:xfrm>
           <a:prstGeom prst="rect">
             <a:avLst/>
@@ -6544,7 +6544,7 @@
               </a:defRPr>
             </a:pPr>
             <a:r>
-              <a:t>합성 의료진 입력·환자 대화 / AI가 새 진단을 내리지 않음</a:t>
+              <a:t>앱 내 선제 대화 · 합성 의료진 입력 / 푸시·문자 연락 아님</a:t>
             </a:r>
           </a:p>
         </p:txBody>
@@ -6880,8 +6880,8 @@
         </p:blipFill>
         <p:spPr>
           <a:xfrm>
-            <a:off x="5852160" y="1865376"/>
-            <a:ext cx="5532120" cy="3618163"/>
+            <a:off x="6080760" y="2240345"/>
+            <a:ext cx="5074920" cy="3319141"/>
           </a:xfrm>
           <a:prstGeom prst="rect">
             <a:avLst/>
@@ -8228,7 +8228,7 @@
               </a:defRPr>
             </a:pPr>
             <a:r>
-              <a:t>단위 테스트 76개 통과</a:t>
+              <a:t>단위 테스트 80개 통과</a:t>
             </a:r>
           </a:p>
           <a:p>
@@ -8389,7 +8389,7 @@
               </a:defRPr>
             </a:pPr>
             <a:r>
-              <a:t>Codex 활용·개선</a:t>
+              <a:t>Codex 역할·검토</a:t>
             </a:r>
           </a:p>
         </p:txBody>
@@ -8428,7 +8428,7 @@
               </a:defRPr>
             </a:pPr>
             <a:r>
-              <a:t>구현 → 원문·테스트 대조</a:t>
+              <a:t>서브 에이전트로 고전 문헌탐색</a:t>
             </a:r>
           </a:p>
           <a:p>
@@ -8444,7 +8444,23 @@
               </a:defRPr>
             </a:pPr>
             <a:r>
-              <a:t>사용자 가독성 피드백 반영: 대화창 확대·보조정보 접기</a:t>
+              <a:t>메인: UI·백엔드 구현</a:t>
+            </a:r>
+          </a:p>
+          <a:p>
+            <a:pPr>
+              <a:spcAft>
+                <a:spcPts val="1000"/>
+              </a:spcAft>
+              <a:defRPr sz="1700" b="0">
+                <a:solidFill>
+                  <a:srgbClr val="1C2A24"/>
+                </a:solidFill>
+                <a:latin typeface="맑은 고딕"/>
+              </a:defRPr>
+            </a:pPr>
+            <a:r>
+              <a:t>원전·인용 위치·환자 원문·테스트 대조</a:t>
             </a:r>
           </a:p>
         </p:txBody>
@@ -9017,7 +9033,7 @@
         <p:spPr>
           <a:xfrm>
             <a:off x="749808" y="5394960"/>
-            <a:ext cx="7315200" cy="393192"/>
+            <a:ext cx="7772400" cy="393192"/>
           </a:xfrm>
           <a:prstGeom prst="roundRect">
             <a:avLst>
@@ -9062,7 +9078,7 @@
         <p:spPr>
           <a:xfrm>
             <a:off x="868680" y="5449824"/>
-            <a:ext cx="7086600" cy="274320"/>
+            <a:ext cx="7543800" cy="274320"/>
           </a:xfrm>
           <a:prstGeom prst="rect">
             <a:avLst/>
@@ -9087,7 +9103,7 @@
               </a:defRPr>
             </a:pPr>
             <a:r>
-              <a:t>재방문·지침 변경마다 누적 기록을 다시 연결</a:t>
+              <a:t>한의학에서 시작 → 현대의학 전반으로 확장 계획</a:t>
             </a:r>
           </a:p>
         </p:txBody>

--- a/presentations/Hanui-Relay-4min.pptx
+++ b/presentations/Hanui-Relay-4min.pptx
@@ -4821,50 +4821,7 @@
       </p:sp>
       <p:sp>
         <p:nvSpPr>
-          <p:cNvPr id="9" name="Rectangle 8"/>
-          <p:cNvSpPr/>
-          <p:nvPr/>
-        </p:nvSpPr>
-        <p:spPr>
-          <a:xfrm>
-            <a:off x="594360" y="2487168"/>
-            <a:ext cx="64008" cy="1426464"/>
-          </a:xfrm>
-          <a:prstGeom prst="rect">
-            <a:avLst/>
-          </a:prstGeom>
-          <a:solidFill>
-            <a:srgbClr val="13533D"/>
-          </a:solidFill>
-          <a:ln>
-            <a:noFill/>
-          </a:ln>
-        </p:spPr>
-        <p:style>
-          <a:lnRef idx="1">
-            <a:schemeClr val="accent1"/>
-          </a:lnRef>
-          <a:fillRef idx="3">
-            <a:schemeClr val="accent1"/>
-          </a:fillRef>
-          <a:effectRef idx="2">
-            <a:schemeClr val="accent1"/>
-          </a:effectRef>
-          <a:fontRef idx="minor">
-            <a:schemeClr val="lt1"/>
-          </a:fontRef>
-        </p:style>
-        <p:txBody>
-          <a:bodyPr rtlCol="0" anchor="ctr"/>
-          <a:lstStyle/>
-          <a:p>
-            <a:pPr algn="ctr"/>
-          </a:p>
-        </p:txBody>
-      </p:sp>
-      <p:sp>
-        <p:nvSpPr>
-          <p:cNvPr id="10" name="TextBox 9"/>
+          <p:cNvPr id="9" name="TextBox 8"/>
           <p:cNvSpPr txBox="1"/>
           <p:nvPr/>
         </p:nvSpPr>
@@ -4903,7 +4860,7 @@
       </p:sp>
       <p:sp>
         <p:nvSpPr>
-          <p:cNvPr id="11" name="TextBox 10"/>
+          <p:cNvPr id="10" name="TextBox 9"/>
           <p:cNvSpPr txBox="1"/>
           <p:nvPr/>
         </p:nvSpPr>
@@ -4942,7 +4899,7 @@
       </p:sp>
       <p:sp>
         <p:nvSpPr>
-          <p:cNvPr id="12" name="Rounded Rectangle 11"/>
+          <p:cNvPr id="11" name="Rounded Rectangle 10"/>
           <p:cNvSpPr/>
           <p:nvPr/>
         </p:nvSpPr>
@@ -4989,50 +4946,7 @@
       </p:sp>
       <p:sp>
         <p:nvSpPr>
-          <p:cNvPr id="13" name="Rectangle 12"/>
-          <p:cNvSpPr/>
-          <p:nvPr/>
-        </p:nvSpPr>
-        <p:spPr>
-          <a:xfrm>
-            <a:off x="6263640" y="2487168"/>
-            <a:ext cx="64008" cy="1426464"/>
-          </a:xfrm>
-          <a:prstGeom prst="rect">
-            <a:avLst/>
-          </a:prstGeom>
-          <a:solidFill>
-            <a:srgbClr val="13533D"/>
-          </a:solidFill>
-          <a:ln>
-            <a:noFill/>
-          </a:ln>
-        </p:spPr>
-        <p:style>
-          <a:lnRef idx="1">
-            <a:schemeClr val="accent1"/>
-          </a:lnRef>
-          <a:fillRef idx="3">
-            <a:schemeClr val="accent1"/>
-          </a:fillRef>
-          <a:effectRef idx="2">
-            <a:schemeClr val="accent1"/>
-          </a:effectRef>
-          <a:fontRef idx="minor">
-            <a:schemeClr val="lt1"/>
-          </a:fontRef>
-        </p:style>
-        <p:txBody>
-          <a:bodyPr rtlCol="0" anchor="ctr"/>
-          <a:lstStyle/>
-          <a:p>
-            <a:pPr algn="ctr"/>
-          </a:p>
-        </p:txBody>
-      </p:sp>
-      <p:sp>
-        <p:nvSpPr>
-          <p:cNvPr id="14" name="TextBox 13"/>
+          <p:cNvPr id="12" name="TextBox 11"/>
           <p:cNvSpPr txBox="1"/>
           <p:nvPr/>
         </p:nvSpPr>
@@ -5071,7 +4985,7 @@
       </p:sp>
       <p:sp>
         <p:nvSpPr>
-          <p:cNvPr id="15" name="TextBox 14"/>
+          <p:cNvPr id="13" name="TextBox 12"/>
           <p:cNvSpPr txBox="1"/>
           <p:nvPr/>
         </p:nvSpPr>
@@ -5110,7 +5024,7 @@
       </p:sp>
       <p:sp>
         <p:nvSpPr>
-          <p:cNvPr id="16" name="TextBox 15"/>
+          <p:cNvPr id="14" name="TextBox 13"/>
           <p:cNvSpPr txBox="1"/>
           <p:nvPr/>
         </p:nvSpPr>
@@ -8114,50 +8028,7 @@
       </p:sp>
       <p:sp>
         <p:nvSpPr>
-          <p:cNvPr id="9" name="Rectangle 8"/>
-          <p:cNvSpPr/>
-          <p:nvPr/>
-        </p:nvSpPr>
-        <p:spPr>
-          <a:xfrm>
-            <a:off x="640080" y="1828800"/>
-            <a:ext cx="64008" cy="3108960"/>
-          </a:xfrm>
-          <a:prstGeom prst="rect">
-            <a:avLst/>
-          </a:prstGeom>
-          <a:solidFill>
-            <a:srgbClr val="13533D"/>
-          </a:solidFill>
-          <a:ln>
-            <a:noFill/>
-          </a:ln>
-        </p:spPr>
-        <p:style>
-          <a:lnRef idx="1">
-            <a:schemeClr val="accent1"/>
-          </a:lnRef>
-          <a:fillRef idx="3">
-            <a:schemeClr val="accent1"/>
-          </a:fillRef>
-          <a:effectRef idx="2">
-            <a:schemeClr val="accent1"/>
-          </a:effectRef>
-          <a:fontRef idx="minor">
-            <a:schemeClr val="lt1"/>
-          </a:fontRef>
-        </p:style>
-        <p:txBody>
-          <a:bodyPr rtlCol="0" anchor="ctr"/>
-          <a:lstStyle/>
-          <a:p>
-            <a:pPr algn="ctr"/>
-          </a:p>
-        </p:txBody>
-      </p:sp>
-      <p:sp>
-        <p:nvSpPr>
-          <p:cNvPr id="10" name="TextBox 9"/>
+          <p:cNvPr id="9" name="TextBox 8"/>
           <p:cNvSpPr txBox="1"/>
           <p:nvPr/>
         </p:nvSpPr>
@@ -8196,7 +8067,7 @@
       </p:sp>
       <p:sp>
         <p:nvSpPr>
-          <p:cNvPr id="11" name="TextBox 10"/>
+          <p:cNvPr id="10" name="TextBox 9"/>
           <p:cNvSpPr txBox="1"/>
           <p:nvPr/>
         </p:nvSpPr>
@@ -8267,7 +8138,7 @@
       </p:sp>
       <p:sp>
         <p:nvSpPr>
-          <p:cNvPr id="12" name="Rounded Rectangle 11"/>
+          <p:cNvPr id="11" name="Rounded Rectangle 10"/>
           <p:cNvSpPr/>
           <p:nvPr/>
         </p:nvSpPr>
@@ -8314,50 +8185,7 @@
       </p:sp>
       <p:sp>
         <p:nvSpPr>
-          <p:cNvPr id="13" name="Rectangle 12"/>
-          <p:cNvSpPr/>
-          <p:nvPr/>
-        </p:nvSpPr>
-        <p:spPr>
-          <a:xfrm>
-            <a:off x="6190488" y="1828800"/>
-            <a:ext cx="64008" cy="3108960"/>
-          </a:xfrm>
-          <a:prstGeom prst="rect">
-            <a:avLst/>
-          </a:prstGeom>
-          <a:solidFill>
-            <a:srgbClr val="13533D"/>
-          </a:solidFill>
-          <a:ln>
-            <a:noFill/>
-          </a:ln>
-        </p:spPr>
-        <p:style>
-          <a:lnRef idx="1">
-            <a:schemeClr val="accent1"/>
-          </a:lnRef>
-          <a:fillRef idx="3">
-            <a:schemeClr val="accent1"/>
-          </a:fillRef>
-          <a:effectRef idx="2">
-            <a:schemeClr val="accent1"/>
-          </a:effectRef>
-          <a:fontRef idx="minor">
-            <a:schemeClr val="lt1"/>
-          </a:fontRef>
-        </p:style>
-        <p:txBody>
-          <a:bodyPr rtlCol="0" anchor="ctr"/>
-          <a:lstStyle/>
-          <a:p>
-            <a:pPr algn="ctr"/>
-          </a:p>
-        </p:txBody>
-      </p:sp>
-      <p:sp>
-        <p:nvSpPr>
-          <p:cNvPr id="14" name="TextBox 13"/>
+          <p:cNvPr id="12" name="TextBox 11"/>
           <p:cNvSpPr txBox="1"/>
           <p:nvPr/>
         </p:nvSpPr>
@@ -8396,7 +8224,7 @@
       </p:sp>
       <p:sp>
         <p:nvSpPr>
-          <p:cNvPr id="15" name="TextBox 14"/>
+          <p:cNvPr id="13" name="TextBox 12"/>
           <p:cNvSpPr txBox="1"/>
           <p:nvPr/>
         </p:nvSpPr>
@@ -8467,7 +8295,7 @@
       </p:sp>
       <p:sp>
         <p:nvSpPr>
-          <p:cNvPr id="16" name="TextBox 15"/>
+          <p:cNvPr id="14" name="TextBox 13"/>
           <p:cNvSpPr txBox="1"/>
           <p:nvPr/>
         </p:nvSpPr>

--- a/presentations/Hanui-Relay-4min.pptx
+++ b/presentations/Hanui-Relay-4min.pptx
@@ -743,7 +743,7 @@
           <a:p/>
           <a:p>
             <a:r>
-              <a:t>“앱 안의 실제 Luna 대화 C입니다. 한의사가 입력한 취침 지침을 바탕으로 Hanui가 먼저 말을 걸었습니다. 제가 ‘어제 새벽 1시에 잤어. 어제 5시간 잤어’라고 답하겠습니다.” **C 화면에서 전송하고 약 20초 기다린다.** “발언의 날짜·시간을 확인해 기록하고 다음 상태를 묻습니다. 이는 앱 내 선제 대화이며 푸시나 문자를 보낸 것은 아닙니다. PDF 캡처는 별도 합성 데모 A입니다.” 시연 C: `http://127.0.0.1:8765/?session=a63cdbff74c6445a91a348fb03da48ed`</a:t>
+              <a:t>“한의사의 진단과 생활 지침을 받은 뒤 에이전트가 앱 안에서 먼저 묻습니다. ‘오늘 점심 후 10분 산책하셨나요? 의사 선생님의 진단에 따른 생활 지침에 있었어요.’ 환자가 예 또는 아니요로 답하면 날짜별 실천 기록과 다음 질문으로 이어집니다. 지금 보는 버튼은 발표용 개념 예시이고, 현재 앱에서는 대화 입력으로 답합니다. 앱 밖 푸시나 문자를 보내지는 않습니다.”</a:t>
             </a:r>
           </a:p>
         </p:txBody>
@@ -895,7 +895,7 @@
           <a:p/>
           <a:p>
             <a:r>
-              <a:t>“다음 방문도 연결합니다. Luna High가 실제 공개 병원 정보를 검색해 이름, 주소, 근거와 전화·예약 링크를 보여줍니다. 예약 준비는 병원 접수가 아닙니다. 사용자가 외부에서 확정을 받고 보고해야 확정 방문으로 기록합니다. 자체 달력에서 일정 추가·수정·삭제와 ICS 내보내기가 됩니다.”</a:t>
+              <a:t>“다음 방문도 연결합니다. 에이전트가 실제 공개 병원 정보를 검색해 이름, 주소, 근거와 전화·예약 링크를 보여줍니다. 예약 준비는 병원 접수가 아닙니다. 사용자가 외부에서 확정을 받고 보고해야 확정 방문으로 기록합니다. 자체 달력에서 일정 추가·수정·삭제와 ICS 내보내기가 됩니다.”</a:t>
             </a:r>
           </a:p>
         </p:txBody>
@@ -971,7 +971,7 @@
           <a:p/>
           <a:p>
             <a:r>
-              <a:t>“서브 에이전트로 고전 문헌탐색, 메인: UI·백엔드 구현을 진행했습니다. 메인 Codex가 원전 판본과 실제 인용 위치, 환자 원문·날짜·수치를 재검증하고 단위·UI·실제 Luna 연동을 확인했습니다. 80개 테스트가 통과했습니다. 가독성 피드백으로 대화창을 키우고 보조정보를 접었습니다.”</a:t>
+              <a:t>“서브 에이전트로 고전 문헌탐색, 메인: UI·백엔드 구현을 진행했습니다. 메인 Codex가 원전 판본과 실제 인용 위치, 환자 원문·날짜·수치를 재검증하고 단위·UI·실제 에이전트 연동을 확인했습니다. 80개 테스트가 통과했습니다. 가독성 피드백으로 대화창을 키우고 보조정보를 접었습니다.”</a:t>
             </a:r>
           </a:p>
         </p:txBody>
@@ -5936,7 +5936,7 @@
               </a:defRPr>
             </a:pPr>
             <a:r>
-              <a:t>HANUI RELAY  /  데모 ①</a:t>
+              <a:t>HANUI RELAY  /  발표용 개념 예시</a:t>
             </a:r>
           </a:p>
         </p:txBody>
@@ -5975,7 +5975,7 @@
               </a:defRPr>
             </a:pPr>
             <a:r>
-              <a:t>앱 안에서 Hanui가 먼저 말을 건다</a:t>
+              <a:t>에이전트가 먼저 예·아니오로 확인한다</a:t>
             </a:r>
           </a:p>
         </p:txBody>
@@ -6109,8 +6109,260 @@
         </p:nvSpPr>
         <p:spPr>
           <a:xfrm>
-            <a:off x="5724144" y="1938528"/>
-            <a:ext cx="5788152" cy="3593592"/>
+            <a:off x="685800" y="2212848"/>
+            <a:ext cx="109728" cy="109728"/>
+          </a:xfrm>
+          <a:prstGeom prst="roundRect">
+            <a:avLst>
+              <a:gd name="adj" fmla="val 12000"/>
+            </a:avLst>
+          </a:prstGeom>
+          <a:solidFill>
+            <a:srgbClr val="13533D"/>
+          </a:solidFill>
+          <a:ln>
+            <a:noFill/>
+          </a:ln>
+        </p:spPr>
+        <p:style>
+          <a:lnRef idx="1">
+            <a:schemeClr val="accent1"/>
+          </a:lnRef>
+          <a:fillRef idx="3">
+            <a:schemeClr val="accent1"/>
+          </a:fillRef>
+          <a:effectRef idx="2">
+            <a:schemeClr val="accent1"/>
+          </a:effectRef>
+          <a:fontRef idx="minor">
+            <a:schemeClr val="lt1"/>
+          </a:fontRef>
+        </p:style>
+        <p:txBody>
+          <a:bodyPr rtlCol="0" anchor="ctr"/>
+          <a:lstStyle/>
+          <a:p>
+            <a:pPr algn="ctr"/>
+          </a:p>
+        </p:txBody>
+      </p:sp>
+      <p:sp>
+        <p:nvSpPr>
+          <p:cNvPr id="9" name="TextBox 8"/>
+          <p:cNvSpPr txBox="1"/>
+          <p:nvPr/>
+        </p:nvSpPr>
+        <p:spPr>
+          <a:xfrm>
+            <a:off x="960120" y="2130552"/>
+            <a:ext cx="4572000" cy="640080"/>
+          </a:xfrm>
+          <a:prstGeom prst="rect">
+            <a:avLst/>
+          </a:prstGeom>
+          <a:noFill/>
+        </p:spPr>
+        <p:txBody>
+          <a:bodyPr wrap="square" lIns="18288" rIns="18288" tIns="9144" bIns="9144">
+            <a:spAutoFit/>
+          </a:bodyPr>
+          <a:lstStyle/>
+          <a:p>
+            <a:pPr>
+              <a:spcAft>
+                <a:spcPts val="1000"/>
+              </a:spcAft>
+              <a:defRPr sz="1900" b="0">
+                <a:solidFill>
+                  <a:srgbClr val="1C2A24"/>
+                </a:solidFill>
+                <a:latin typeface="맑은 고딕"/>
+              </a:defRPr>
+            </a:pPr>
+            <a:r>
+              <a:t>한의사 진단·생활 지침을 맥락으로</a:t>
+            </a:r>
+          </a:p>
+        </p:txBody>
+      </p:sp>
+      <p:sp>
+        <p:nvSpPr>
+          <p:cNvPr id="10" name="Rounded Rectangle 9"/>
+          <p:cNvSpPr/>
+          <p:nvPr/>
+        </p:nvSpPr>
+        <p:spPr>
+          <a:xfrm>
+            <a:off x="685800" y="3209544"/>
+            <a:ext cx="109728" cy="109728"/>
+          </a:xfrm>
+          <a:prstGeom prst="roundRect">
+            <a:avLst>
+              <a:gd name="adj" fmla="val 12000"/>
+            </a:avLst>
+          </a:prstGeom>
+          <a:solidFill>
+            <a:srgbClr val="13533D"/>
+          </a:solidFill>
+          <a:ln>
+            <a:noFill/>
+          </a:ln>
+        </p:spPr>
+        <p:style>
+          <a:lnRef idx="1">
+            <a:schemeClr val="accent1"/>
+          </a:lnRef>
+          <a:fillRef idx="3">
+            <a:schemeClr val="accent1"/>
+          </a:fillRef>
+          <a:effectRef idx="2">
+            <a:schemeClr val="accent1"/>
+          </a:effectRef>
+          <a:fontRef idx="minor">
+            <a:schemeClr val="lt1"/>
+          </a:fontRef>
+        </p:style>
+        <p:txBody>
+          <a:bodyPr rtlCol="0" anchor="ctr"/>
+          <a:lstStyle/>
+          <a:p>
+            <a:pPr algn="ctr"/>
+          </a:p>
+        </p:txBody>
+      </p:sp>
+      <p:sp>
+        <p:nvSpPr>
+          <p:cNvPr id="11" name="TextBox 10"/>
+          <p:cNvSpPr txBox="1"/>
+          <p:nvPr/>
+        </p:nvSpPr>
+        <p:spPr>
+          <a:xfrm>
+            <a:off x="960120" y="3127248"/>
+            <a:ext cx="4572000" cy="640080"/>
+          </a:xfrm>
+          <a:prstGeom prst="rect">
+            <a:avLst/>
+          </a:prstGeom>
+          <a:noFill/>
+        </p:spPr>
+        <p:txBody>
+          <a:bodyPr wrap="square" lIns="18288" rIns="18288" tIns="9144" bIns="9144">
+            <a:spAutoFit/>
+          </a:bodyPr>
+          <a:lstStyle/>
+          <a:p>
+            <a:pPr>
+              <a:spcAft>
+                <a:spcPts val="1000"/>
+              </a:spcAft>
+              <a:defRPr sz="1900" b="0">
+                <a:solidFill>
+                  <a:srgbClr val="1C2A24"/>
+                </a:solidFill>
+                <a:latin typeface="맑은 고딕"/>
+              </a:defRPr>
+            </a:pPr>
+            <a:r>
+              <a:t>Hanui가 오늘의 실천 여부를 먼저 질문</a:t>
+            </a:r>
+          </a:p>
+        </p:txBody>
+      </p:sp>
+      <p:sp>
+        <p:nvSpPr>
+          <p:cNvPr id="12" name="Rounded Rectangle 11"/>
+          <p:cNvSpPr/>
+          <p:nvPr/>
+        </p:nvSpPr>
+        <p:spPr>
+          <a:xfrm>
+            <a:off x="685800" y="4206240"/>
+            <a:ext cx="109728" cy="109728"/>
+          </a:xfrm>
+          <a:prstGeom prst="roundRect">
+            <a:avLst>
+              <a:gd name="adj" fmla="val 12000"/>
+            </a:avLst>
+          </a:prstGeom>
+          <a:solidFill>
+            <a:srgbClr val="13533D"/>
+          </a:solidFill>
+          <a:ln>
+            <a:noFill/>
+          </a:ln>
+        </p:spPr>
+        <p:style>
+          <a:lnRef idx="1">
+            <a:schemeClr val="accent1"/>
+          </a:lnRef>
+          <a:fillRef idx="3">
+            <a:schemeClr val="accent1"/>
+          </a:fillRef>
+          <a:effectRef idx="2">
+            <a:schemeClr val="accent1"/>
+          </a:effectRef>
+          <a:fontRef idx="minor">
+            <a:schemeClr val="lt1"/>
+          </a:fontRef>
+        </p:style>
+        <p:txBody>
+          <a:bodyPr rtlCol="0" anchor="ctr"/>
+          <a:lstStyle/>
+          <a:p>
+            <a:pPr algn="ctr"/>
+          </a:p>
+        </p:txBody>
+      </p:sp>
+      <p:sp>
+        <p:nvSpPr>
+          <p:cNvPr id="13" name="TextBox 12"/>
+          <p:cNvSpPr txBox="1"/>
+          <p:nvPr/>
+        </p:nvSpPr>
+        <p:spPr>
+          <a:xfrm>
+            <a:off x="960120" y="4123944"/>
+            <a:ext cx="4572000" cy="640080"/>
+          </a:xfrm>
+          <a:prstGeom prst="rect">
+            <a:avLst/>
+          </a:prstGeom>
+          <a:noFill/>
+        </p:spPr>
+        <p:txBody>
+          <a:bodyPr wrap="square" lIns="18288" rIns="18288" tIns="9144" bIns="9144">
+            <a:spAutoFit/>
+          </a:bodyPr>
+          <a:lstStyle/>
+          <a:p>
+            <a:pPr>
+              <a:spcAft>
+                <a:spcPts val="1000"/>
+              </a:spcAft>
+              <a:defRPr sz="1900" b="0">
+                <a:solidFill>
+                  <a:srgbClr val="1C2A24"/>
+                </a:solidFill>
+                <a:latin typeface="맑은 고딕"/>
+              </a:defRPr>
+            </a:pPr>
+            <a:r>
+              <a:t>응답은 날짜별 기록·다음 질문으로 연결</a:t>
+            </a:r>
+          </a:p>
+        </p:txBody>
+      </p:sp>
+      <p:sp>
+        <p:nvSpPr>
+          <p:cNvPr id="14" name="Rounded Rectangle 13"/>
+          <p:cNvSpPr/>
+          <p:nvPr/>
+        </p:nvSpPr>
+        <p:spPr>
+          <a:xfrm>
+            <a:off x="5641848" y="1847088"/>
+            <a:ext cx="5705856" cy="3621024"/>
           </a:xfrm>
           <a:prstGeom prst="roundRect">
             <a:avLst>
@@ -6148,40 +6400,16 @@
           </a:p>
         </p:txBody>
       </p:sp>
-      <p:pic>
-        <p:nvPicPr>
-          <p:cNvPr id="9" name="Picture 8" descr="opening-sequence-v2-crop-0-550.png"/>
-          <p:cNvPicPr>
-            <a:picLocks noChangeAspect="1"/>
-          </p:cNvPicPr>
-          <p:nvPr/>
-        </p:nvPicPr>
-        <p:blipFill>
-          <a:blip r:embed="rId2"/>
-          <a:stretch>
-            <a:fillRect/>
-          </a:stretch>
-        </p:blipFill>
-        <p:spPr>
-          <a:xfrm>
-            <a:off x="5989320" y="2303744"/>
-            <a:ext cx="5257800" cy="2863158"/>
-          </a:xfrm>
-          <a:prstGeom prst="rect">
-            <a:avLst/>
-          </a:prstGeom>
-        </p:spPr>
-      </p:pic>
-      <p:sp>
-        <p:nvSpPr>
-          <p:cNvPr id="10" name="Rounded Rectangle 9"/>
+      <p:sp>
+        <p:nvSpPr>
+          <p:cNvPr id="15" name="Rounded Rectangle 14"/>
           <p:cNvSpPr/>
           <p:nvPr/>
         </p:nvSpPr>
         <p:spPr>
           <a:xfrm>
-            <a:off x="685800" y="2203703"/>
-            <a:ext cx="109728" cy="109728"/>
+            <a:off x="5934456" y="2112264"/>
+            <a:ext cx="5010912" cy="393192"/>
           </a:xfrm>
           <a:prstGeom prst="roundRect">
             <a:avLst>
@@ -6189,7 +6417,7 @@
             </a:avLst>
           </a:prstGeom>
           <a:solidFill>
-            <a:srgbClr val="13533D"/>
+            <a:srgbClr val="E0F0E8"/>
           </a:solidFill>
           <a:ln>
             <a:noFill/>
@@ -6219,14 +6447,14 @@
       </p:sp>
       <p:sp>
         <p:nvSpPr>
-          <p:cNvPr id="11" name="TextBox 10"/>
+          <p:cNvPr id="16" name="TextBox 15"/>
           <p:cNvSpPr txBox="1"/>
           <p:nvPr/>
         </p:nvSpPr>
         <p:spPr>
           <a:xfrm>
-            <a:off x="960120" y="2121408"/>
-            <a:ext cx="4526280" cy="640080"/>
+            <a:off x="6053328" y="2167128"/>
+            <a:ext cx="4782312" cy="274320"/>
           </a:xfrm>
           <a:prstGeom prst="rect">
             <a:avLst/>
@@ -6243,7 +6471,85 @@
               <a:spcAft>
                 <a:spcPts val="1000"/>
               </a:spcAft>
-              <a:defRPr sz="1900" b="0">
+              <a:defRPr sz="1300" b="1">
+                <a:solidFill>
+                  <a:srgbClr val="13533D"/>
+                </a:solidFill>
+                <a:latin typeface="맑은 고딕"/>
+              </a:defRPr>
+            </a:pPr>
+            <a:r>
+              <a:t>의료진 지침을 기억하고 먼저 확인</a:t>
+            </a:r>
+          </a:p>
+        </p:txBody>
+      </p:sp>
+      <p:sp>
+        <p:nvSpPr>
+          <p:cNvPr id="17" name="TextBox 16"/>
+          <p:cNvSpPr txBox="1"/>
+          <p:nvPr/>
+        </p:nvSpPr>
+        <p:spPr>
+          <a:xfrm>
+            <a:off x="5961888" y="2834640"/>
+            <a:ext cx="5029200" cy="713232"/>
+          </a:xfrm>
+          <a:prstGeom prst="rect">
+            <a:avLst/>
+          </a:prstGeom>
+          <a:noFill/>
+        </p:spPr>
+        <p:txBody>
+          <a:bodyPr wrap="square" lIns="18288" rIns="18288" tIns="9144" bIns="9144">
+            <a:spAutoFit/>
+          </a:bodyPr>
+          <a:lstStyle/>
+          <a:p>
+            <a:pPr>
+              <a:spcAft>
+                <a:spcPts val="1000"/>
+              </a:spcAft>
+              <a:defRPr sz="2300" b="1">
+                <a:solidFill>
+                  <a:srgbClr val="13533D"/>
+                </a:solidFill>
+                <a:latin typeface="맑은 고딕"/>
+              </a:defRPr>
+            </a:pPr>
+            <a:r>
+              <a:t>오늘 점심 후 10분 산책하셨나요?</a:t>
+            </a:r>
+          </a:p>
+        </p:txBody>
+      </p:sp>
+      <p:sp>
+        <p:nvSpPr>
+          <p:cNvPr id="18" name="TextBox 17"/>
+          <p:cNvSpPr txBox="1"/>
+          <p:nvPr/>
+        </p:nvSpPr>
+        <p:spPr>
+          <a:xfrm>
+            <a:off x="5961888" y="3675887"/>
+            <a:ext cx="5010912" cy="676656"/>
+          </a:xfrm>
+          <a:prstGeom prst="rect">
+            <a:avLst/>
+          </a:prstGeom>
+          <a:noFill/>
+        </p:spPr>
+        <p:txBody>
+          <a:bodyPr wrap="square" lIns="18288" rIns="18288" tIns="9144" bIns="9144">
+            <a:spAutoFit/>
+          </a:bodyPr>
+          <a:lstStyle/>
+          <a:p>
+            <a:pPr>
+              <a:spcAft>
+                <a:spcPts val="1000"/>
+              </a:spcAft>
+              <a:defRPr sz="1600" b="0">
                 <a:solidFill>
                   <a:srgbClr val="1C2A24"/>
                 </a:solidFill>
@@ -6251,21 +6557,21 @@
               </a:defRPr>
             </a:pPr>
             <a:r>
-              <a:t>합성 한의사 진단: 기능성 소화불량</a:t>
-            </a:r>
-          </a:p>
-        </p:txBody>
-      </p:sp>
-      <p:sp>
-        <p:nvSpPr>
-          <p:cNvPr id="12" name="Rounded Rectangle 11"/>
+              <a:t>의사 선생님의 진단에 따른 생활 지침에 있었어요.</a:t>
+            </a:r>
+          </a:p>
+        </p:txBody>
+      </p:sp>
+      <p:sp>
+        <p:nvSpPr>
+          <p:cNvPr id="19" name="Rounded Rectangle 18"/>
           <p:cNvSpPr/>
           <p:nvPr/>
         </p:nvSpPr>
         <p:spPr>
           <a:xfrm>
-            <a:off x="685800" y="3227832"/>
-            <a:ext cx="109728" cy="109728"/>
+            <a:off x="6446520" y="4645152"/>
+            <a:ext cx="1737360" cy="576072"/>
           </a:xfrm>
           <a:prstGeom prst="roundRect">
             <a:avLst>
@@ -6273,7 +6579,7 @@
             </a:avLst>
           </a:prstGeom>
           <a:solidFill>
-            <a:srgbClr val="13533D"/>
+            <a:srgbClr val="E0F0E8"/>
           </a:solidFill>
           <a:ln>
             <a:noFill/>
@@ -6303,14 +6609,14 @@
       </p:sp>
       <p:sp>
         <p:nvSpPr>
-          <p:cNvPr id="13" name="TextBox 12"/>
+          <p:cNvPr id="20" name="TextBox 19"/>
           <p:cNvSpPr txBox="1"/>
           <p:nvPr/>
         </p:nvSpPr>
         <p:spPr>
           <a:xfrm>
-            <a:off x="960120" y="3145536"/>
-            <a:ext cx="4526280" cy="640080"/>
+            <a:off x="6858000" y="4745736"/>
+            <a:ext cx="868680" cy="338328"/>
           </a:xfrm>
           <a:prstGeom prst="rect">
             <a:avLst/>
@@ -6327,29 +6633,29 @@
               <a:spcAft>
                 <a:spcPts val="1000"/>
               </a:spcAft>
-              <a:defRPr sz="1900" b="0">
-                <a:solidFill>
-                  <a:srgbClr val="1C2A24"/>
+              <a:defRPr sz="1900" b="1">
+                <a:solidFill>
+                  <a:srgbClr val="13533D"/>
                 </a:solidFill>
                 <a:latin typeface="맑은 고딕"/>
               </a:defRPr>
             </a:pPr>
             <a:r>
-              <a:t>Hanui: ‘어젯밤 몇 시에 주무셨어요?’</a:t>
-            </a:r>
-          </a:p>
-        </p:txBody>
-      </p:sp>
-      <p:sp>
-        <p:nvSpPr>
-          <p:cNvPr id="14" name="Rounded Rectangle 13"/>
+              <a:t>예</a:t>
+            </a:r>
+          </a:p>
+        </p:txBody>
+      </p:sp>
+      <p:sp>
+        <p:nvSpPr>
+          <p:cNvPr id="21" name="Rounded Rectangle 20"/>
           <p:cNvSpPr/>
           <p:nvPr/>
         </p:nvSpPr>
         <p:spPr>
           <a:xfrm>
-            <a:off x="685800" y="4251960"/>
-            <a:ext cx="109728" cy="109728"/>
+            <a:off x="8677656" y="4645152"/>
+            <a:ext cx="1737360" cy="576072"/>
           </a:xfrm>
           <a:prstGeom prst="roundRect">
             <a:avLst>
@@ -6357,7 +6663,7 @@
             </a:avLst>
           </a:prstGeom>
           <a:solidFill>
-            <a:srgbClr val="13533D"/>
+            <a:srgbClr val="E0F0E8"/>
           </a:solidFill>
           <a:ln>
             <a:noFill/>
@@ -6387,14 +6693,14 @@
       </p:sp>
       <p:sp>
         <p:nvSpPr>
-          <p:cNvPr id="15" name="TextBox 14"/>
+          <p:cNvPr id="22" name="TextBox 21"/>
           <p:cNvSpPr txBox="1"/>
           <p:nvPr/>
         </p:nvSpPr>
         <p:spPr>
           <a:xfrm>
-            <a:off x="960120" y="4169664"/>
-            <a:ext cx="4526280" cy="640080"/>
+            <a:off x="8924544" y="4745736"/>
+            <a:ext cx="1225296" cy="338328"/>
           </a:xfrm>
           <a:prstGeom prst="rect">
             <a:avLst/>
@@ -6411,29 +6717,29 @@
               <a:spcAft>
                 <a:spcPts val="1000"/>
               </a:spcAft>
-              <a:defRPr sz="1900" b="0">
-                <a:solidFill>
-                  <a:srgbClr val="1C2A24"/>
+              <a:defRPr sz="1900" b="1">
+                <a:solidFill>
+                  <a:srgbClr val="13533D"/>
                 </a:solidFill>
                 <a:latin typeface="맑은 고딕"/>
               </a:defRPr>
             </a:pPr>
             <a:r>
-              <a:t>환자: ‘새벽 1시·5시간’ → 다음 질문</a:t>
-            </a:r>
-          </a:p>
-        </p:txBody>
-      </p:sp>
-      <p:sp>
-        <p:nvSpPr>
-          <p:cNvPr id="16" name="TextBox 15"/>
+              <a:t>아니요</a:t>
+            </a:r>
+          </a:p>
+        </p:txBody>
+      </p:sp>
+      <p:sp>
+        <p:nvSpPr>
+          <p:cNvPr id="23" name="TextBox 22"/>
           <p:cNvSpPr txBox="1"/>
           <p:nvPr/>
         </p:nvSpPr>
         <p:spPr>
           <a:xfrm>
-            <a:off x="731520" y="5989320"/>
-            <a:ext cx="10607040" cy="329184"/>
+            <a:off x="713232" y="5971032"/>
+            <a:ext cx="10789920" cy="274320"/>
           </a:xfrm>
           <a:prstGeom prst="rect">
             <a:avLst/>
@@ -6458,7 +6764,7 @@
               </a:defRPr>
             </a:pPr>
             <a:r>
-              <a:t>앱 내 선제 대화 · 합성 의료진 입력 / 푸시·문자 연락 아님</a:t>
+              <a:t>앱 내 선제 대화는 구현 · 예/아니오 버튼은 기획 화면</a:t>
             </a:r>
           </a:p>
         </p:txBody>
@@ -7314,7 +7620,7 @@
       </p:sp>
       <p:pic>
         <p:nvPicPr>
-          <p:cNvPr id="9" name="Picture 8" descr="showcase-calendar-crop-0-1337.png"/>
+          <p:cNvPr id="9" name="Picture 8" descr="showcase-calendar-crop-379-1337.png"/>
           <p:cNvPicPr>
             <a:picLocks noChangeAspect="1"/>
           </p:cNvPicPr>
@@ -7328,8 +7634,8 @@
         </p:blipFill>
         <p:spPr>
           <a:xfrm>
-            <a:off x="6184958" y="1737360"/>
-            <a:ext cx="4756794" cy="4416552"/>
+            <a:off x="5715000" y="2050688"/>
+            <a:ext cx="5696712" cy="3789895"/>
           </a:xfrm>
           <a:prstGeom prst="rect">
             <a:avLst/>
@@ -8115,7 +8421,7 @@
               </a:defRPr>
             </a:pPr>
             <a:r>
-              <a:t>실제 Luna 선행질문→코칭 1회</a:t>
+              <a:t>실제 에이전트 선행질문→코칭 1회</a:t>
             </a:r>
           </a:p>
           <a:p>
